--- a/media/resources/files/Ekvivalenettuuluk_Kaytalanuuchu_Onduktardy_Bolchokko_JoopTorchosu_NKaxYNb.pptx
+++ b/media/resources/files/Ekvivalenettuuluk_Kaytalanuuchu_Onduktardy_Bolchokko_JoopTorchosu_NKaxYNb.pptx
@@ -38267,7 +38267,7 @@
             </a:pPr>
             <a:r>
               <a:rPr lang="ru-RU" sz="2400" dirty="0"/>
-              <a:t>Турдуу пикирлер учун ыраазычылык билдиребиз.</a:t>
+              <a:t>Түрдүү пикирлер үчүн ыраазычылык билдиребиз.</a:t>
             </a:r>
           </a:p>
           <a:p>

--- a/media/resources/files/Ekvivalenettuuluk_Kaytalanuuchu_Onduktardy_Bolchokko_JoopTorchosu_NKaxYNb.pptx
+++ b/media/resources/files/Ekvivalenettuuluk_Kaytalanuuchu_Onduktardy_Bolchokko_JoopTorchosu_NKaxYNb.pptx
@@ -8645,7 +8645,7 @@
                           <a:ea typeface="+mn-ea"/>
                           <a:cs typeface="+mn-cs"/>
                         </a:rPr>
-                        <a:t>0.4</a:t>
+                        <a:t>0,4</a:t>
                       </a:r>
                     </a:p>
                   </a:txBody>
@@ -8736,7 +8736,7 @@
                           <a:ea typeface="+mn-ea"/>
                           <a:cs typeface="+mn-cs"/>
                         </a:rPr>
-                        <a:t>0.17</a:t>
+                        <a:t>0,17</a:t>
                       </a:r>
                     </a:p>
                   </a:txBody>
@@ -8827,7 +8827,7 @@
                           <a:ea typeface="+mn-ea"/>
                           <a:cs typeface="+mn-cs"/>
                         </a:rPr>
-                        <a:t>0.250</a:t>
+                        <a:t>0,250</a:t>
                       </a:r>
                     </a:p>
                   </a:txBody>
@@ -8918,7 +8918,7 @@
                           <a:ea typeface="+mn-ea"/>
                           <a:cs typeface="+mn-cs"/>
                         </a:rPr>
-                        <a:t>0.8</a:t>
+                        <a:t>0,8</a:t>
                       </a:r>
                     </a:p>
                   </a:txBody>
@@ -9009,7 +9009,7 @@
                           <a:ea typeface="+mn-ea"/>
                           <a:cs typeface="+mn-cs"/>
                         </a:rPr>
-                        <a:t>0.198</a:t>
+                        <a:t>0,198</a:t>
                       </a:r>
                     </a:p>
                   </a:txBody>
@@ -9107,7 +9107,7 @@
                           <a:ea typeface="+mn-ea"/>
                           <a:cs typeface="+mn-cs"/>
                         </a:rPr>
-                        <a:t>0.159</a:t>
+                        <a:t>0,159</a:t>
                       </a:r>
                     </a:p>
                   </a:txBody>
@@ -9198,7 +9198,7 @@
                           <a:ea typeface="+mn-ea"/>
                           <a:cs typeface="+mn-cs"/>
                         </a:rPr>
-                        <a:t>0.6</a:t>
+                        <a:t>0,6</a:t>
                       </a:r>
                     </a:p>
                   </a:txBody>
@@ -9289,7 +9289,7 @@
                           <a:ea typeface="+mn-ea"/>
                           <a:cs typeface="+mn-cs"/>
                         </a:rPr>
-                        <a:t>0.045</a:t>
+                        <a:t>0,045</a:t>
                       </a:r>
                     </a:p>
                   </a:txBody>
@@ -9380,7 +9380,7 @@
                           <a:ea typeface="+mn-ea"/>
                           <a:cs typeface="+mn-cs"/>
                         </a:rPr>
-                        <a:t>0.558</a:t>
+                        <a:t>0,558</a:t>
                       </a:r>
                     </a:p>
                   </a:txBody>
@@ -9471,7 +9471,7 @@
                           <a:ea typeface="+mn-ea"/>
                           <a:cs typeface="+mn-cs"/>
                         </a:rPr>
-                        <a:t>0.14</a:t>
+                        <a:t>0,14</a:t>
                       </a:r>
                     </a:p>
                   </a:txBody>
@@ -9569,7 +9569,7 @@
                           <a:ea typeface="+mn-ea"/>
                           <a:cs typeface="+mn-cs"/>
                         </a:rPr>
-                        <a:t>0.12</a:t>
+                        <a:t>0,12</a:t>
                       </a:r>
                     </a:p>
                   </a:txBody>
@@ -9660,7 +9660,7 @@
                           <a:ea typeface="+mn-ea"/>
                           <a:cs typeface="+mn-cs"/>
                         </a:rPr>
-                        <a:t>0.207</a:t>
+                        <a:t>0,207</a:t>
                       </a:r>
                     </a:p>
                   </a:txBody>
@@ -9751,7 +9751,7 @@
                           <a:ea typeface="+mn-ea"/>
                           <a:cs typeface="+mn-cs"/>
                         </a:rPr>
-                        <a:t>0.35</a:t>
+                        <a:t>0,35</a:t>
                       </a:r>
                     </a:p>
                   </a:txBody>
@@ -9842,7 +9842,7 @@
                           <a:ea typeface="+mn-ea"/>
                           <a:cs typeface="+mn-cs"/>
                         </a:rPr>
-                        <a:t>0.063</a:t>
+                        <a:t>0,063</a:t>
                       </a:r>
                     </a:p>
                   </a:txBody>
@@ -9933,7 +9933,7 @@
                           <a:ea typeface="+mn-ea"/>
                           <a:cs typeface="+mn-cs"/>
                         </a:rPr>
-                        <a:t>0.81</a:t>
+                        <a:t>0,81</a:t>
                       </a:r>
                     </a:p>
                   </a:txBody>
@@ -10031,7 +10031,7 @@
                           <a:ea typeface="+mn-ea"/>
                           <a:cs typeface="+mn-cs"/>
                         </a:rPr>
-                        <a:t>0.08</a:t>
+                        <a:t>0,08</a:t>
                       </a:r>
                     </a:p>
                   </a:txBody>
@@ -10122,7 +10122,7 @@
                           <a:ea typeface="+mn-ea"/>
                           <a:cs typeface="+mn-cs"/>
                         </a:rPr>
-                        <a:t>0.51</a:t>
+                        <a:t>0,51</a:t>
                       </a:r>
                     </a:p>
                   </a:txBody>
@@ -10213,7 +10213,7 @@
                           <a:ea typeface="+mn-ea"/>
                           <a:cs typeface="+mn-cs"/>
                         </a:rPr>
-                        <a:t>0.1</a:t>
+                        <a:t>0,1</a:t>
                       </a:r>
                     </a:p>
                   </a:txBody>
@@ -10304,7 +10304,7 @@
                           <a:ea typeface="+mn-ea"/>
                           <a:cs typeface="+mn-cs"/>
                         </a:rPr>
-                        <a:t>0.27</a:t>
+                        <a:t>0,27</a:t>
                       </a:r>
                     </a:p>
                   </a:txBody>
@@ -10395,7 +10395,7 @@
                           <a:ea typeface="+mn-ea"/>
                           <a:cs typeface="+mn-cs"/>
                         </a:rPr>
-                        <a:t>0.687</a:t>
+                        <a:t>0,687</a:t>
                       </a:r>
                     </a:p>
                   </a:txBody>
@@ -17094,7 +17094,7 @@
                           <a:ea typeface="+mn-ea"/>
                           <a:cs typeface="+mn-cs"/>
                         </a:rPr>
-                        <a:t>0.4</a:t>
+                        <a:t>0,4</a:t>
                       </a:r>
                     </a:p>
                   </a:txBody>
@@ -17185,7 +17185,7 @@
                           <a:ea typeface="+mn-ea"/>
                           <a:cs typeface="+mn-cs"/>
                         </a:rPr>
-                        <a:t>0.17</a:t>
+                        <a:t>0,17</a:t>
                       </a:r>
                     </a:p>
                   </a:txBody>
@@ -17276,7 +17276,7 @@
                           <a:ea typeface="+mn-ea"/>
                           <a:cs typeface="+mn-cs"/>
                         </a:rPr>
-                        <a:t>0.250</a:t>
+                        <a:t>0,250</a:t>
                       </a:r>
                     </a:p>
                   </a:txBody>
@@ -17367,7 +17367,7 @@
                           <a:ea typeface="+mn-ea"/>
                           <a:cs typeface="+mn-cs"/>
                         </a:rPr>
-                        <a:t>0.8</a:t>
+                        <a:t>0,8</a:t>
                       </a:r>
                     </a:p>
                   </a:txBody>
@@ -17458,7 +17458,7 @@
                           <a:ea typeface="+mn-ea"/>
                           <a:cs typeface="+mn-cs"/>
                         </a:rPr>
-                        <a:t>0.198</a:t>
+                        <a:t>0,198</a:t>
                       </a:r>
                     </a:p>
                   </a:txBody>
@@ -17556,7 +17556,7 @@
                           <a:ea typeface="+mn-ea"/>
                           <a:cs typeface="+mn-cs"/>
                         </a:rPr>
-                        <a:t>0.159</a:t>
+                        <a:t>0,159</a:t>
                       </a:r>
                     </a:p>
                   </a:txBody>
@@ -17647,7 +17647,7 @@
                           <a:ea typeface="+mn-ea"/>
                           <a:cs typeface="+mn-cs"/>
                         </a:rPr>
-                        <a:t>0.6</a:t>
+                        <a:t>0,6</a:t>
                       </a:r>
                     </a:p>
                   </a:txBody>
@@ -17738,7 +17738,7 @@
                           <a:ea typeface="+mn-ea"/>
                           <a:cs typeface="+mn-cs"/>
                         </a:rPr>
-                        <a:t>0.045</a:t>
+                        <a:t>0,045</a:t>
                       </a:r>
                     </a:p>
                   </a:txBody>
@@ -17829,7 +17829,7 @@
                           <a:ea typeface="+mn-ea"/>
                           <a:cs typeface="+mn-cs"/>
                         </a:rPr>
-                        <a:t>0.558</a:t>
+                        <a:t>0,558</a:t>
                       </a:r>
                     </a:p>
                   </a:txBody>
@@ -17920,7 +17920,7 @@
                           <a:ea typeface="+mn-ea"/>
                           <a:cs typeface="+mn-cs"/>
                         </a:rPr>
-                        <a:t>0.14</a:t>
+                        <a:t>0,14</a:t>
                       </a:r>
                     </a:p>
                   </a:txBody>
@@ -18018,7 +18018,7 @@
                           <a:ea typeface="+mn-ea"/>
                           <a:cs typeface="+mn-cs"/>
                         </a:rPr>
-                        <a:t>0.12</a:t>
+                        <a:t>0,12</a:t>
                       </a:r>
                     </a:p>
                   </a:txBody>
@@ -18109,7 +18109,7 @@
                           <a:ea typeface="+mn-ea"/>
                           <a:cs typeface="+mn-cs"/>
                         </a:rPr>
-                        <a:t>0.207</a:t>
+                        <a:t>0,207</a:t>
                       </a:r>
                     </a:p>
                   </a:txBody>
@@ -18200,7 +18200,7 @@
                           <a:ea typeface="+mn-ea"/>
                           <a:cs typeface="+mn-cs"/>
                         </a:rPr>
-                        <a:t>0.35</a:t>
+                        <a:t>0,35</a:t>
                       </a:r>
                     </a:p>
                   </a:txBody>
@@ -18291,7 +18291,7 @@
                           <a:ea typeface="+mn-ea"/>
                           <a:cs typeface="+mn-cs"/>
                         </a:rPr>
-                        <a:t>0.063</a:t>
+                        <a:t>0,063</a:t>
                       </a:r>
                     </a:p>
                   </a:txBody>
@@ -18382,7 +18382,7 @@
                           <a:ea typeface="+mn-ea"/>
                           <a:cs typeface="+mn-cs"/>
                         </a:rPr>
-                        <a:t>0.81</a:t>
+                        <a:t>0,81</a:t>
                       </a:r>
                     </a:p>
                   </a:txBody>
@@ -18480,7 +18480,7 @@
                           <a:ea typeface="+mn-ea"/>
                           <a:cs typeface="+mn-cs"/>
                         </a:rPr>
-                        <a:t>0.08</a:t>
+                        <a:t>0,08</a:t>
                       </a:r>
                     </a:p>
                   </a:txBody>
@@ -18571,7 +18571,7 @@
                           <a:ea typeface="+mn-ea"/>
                           <a:cs typeface="+mn-cs"/>
                         </a:rPr>
-                        <a:t>0.51</a:t>
+                        <a:t>0,51</a:t>
                       </a:r>
                     </a:p>
                   </a:txBody>
@@ -18662,7 +18662,7 @@
                           <a:ea typeface="+mn-ea"/>
                           <a:cs typeface="+mn-cs"/>
                         </a:rPr>
-                        <a:t>0.1</a:t>
+                        <a:t>0,1</a:t>
                       </a:r>
                     </a:p>
                   </a:txBody>
@@ -18753,7 +18753,7 @@
                           <a:ea typeface="+mn-ea"/>
                           <a:cs typeface="+mn-cs"/>
                         </a:rPr>
-                        <a:t>0.27</a:t>
+                        <a:t>0,27</a:t>
                       </a:r>
                     </a:p>
                   </a:txBody>
@@ -18844,7 +18844,7 @@
                           <a:ea typeface="+mn-ea"/>
                           <a:cs typeface="+mn-cs"/>
                         </a:rPr>
-                        <a:t>0.687</a:t>
+                        <a:t>0,687</a:t>
                       </a:r>
                     </a:p>
                   </a:txBody>
@@ -25753,7 +25753,7 @@
                           <a:ea typeface="+mn-ea"/>
                           <a:cs typeface="+mn-cs"/>
                         </a:rPr>
-                        <a:t>0.4</a:t>
+                        <a:t>0,4</a:t>
                       </a:r>
                     </a:p>
                   </a:txBody>
@@ -25844,7 +25844,7 @@
                           <a:ea typeface="+mn-ea"/>
                           <a:cs typeface="+mn-cs"/>
                         </a:rPr>
-                        <a:t>0.17</a:t>
+                        <a:t>0,17</a:t>
                       </a:r>
                     </a:p>
                   </a:txBody>
@@ -25935,7 +25935,7 @@
                           <a:ea typeface="+mn-ea"/>
                           <a:cs typeface="+mn-cs"/>
                         </a:rPr>
-                        <a:t>0.250</a:t>
+                        <a:t>0,250</a:t>
                       </a:r>
                     </a:p>
                   </a:txBody>
@@ -26026,7 +26026,7 @@
                           <a:ea typeface="+mn-ea"/>
                           <a:cs typeface="+mn-cs"/>
                         </a:rPr>
-                        <a:t>0.8</a:t>
+                        <a:t>0,8</a:t>
                       </a:r>
                     </a:p>
                   </a:txBody>
@@ -26117,7 +26117,7 @@
                           <a:ea typeface="+mn-ea"/>
                           <a:cs typeface="+mn-cs"/>
                         </a:rPr>
-                        <a:t>0.198</a:t>
+                        <a:t>0,198</a:t>
                       </a:r>
                     </a:p>
                   </a:txBody>
@@ -26215,7 +26215,7 @@
                           <a:ea typeface="+mn-ea"/>
                           <a:cs typeface="+mn-cs"/>
                         </a:rPr>
-                        <a:t>0.159</a:t>
+                        <a:t>0,159</a:t>
                       </a:r>
                     </a:p>
                   </a:txBody>
@@ -26306,7 +26306,7 @@
                           <a:ea typeface="+mn-ea"/>
                           <a:cs typeface="+mn-cs"/>
                         </a:rPr>
-                        <a:t>0.6</a:t>
+                        <a:t>0,6</a:t>
                       </a:r>
                     </a:p>
                   </a:txBody>
@@ -26397,7 +26397,7 @@
                           <a:ea typeface="+mn-ea"/>
                           <a:cs typeface="+mn-cs"/>
                         </a:rPr>
-                        <a:t>0.045</a:t>
+                        <a:t>0,045</a:t>
                       </a:r>
                     </a:p>
                   </a:txBody>
@@ -26488,7 +26488,7 @@
                           <a:ea typeface="+mn-ea"/>
                           <a:cs typeface="+mn-cs"/>
                         </a:rPr>
-                        <a:t>0.558</a:t>
+                        <a:t>0,558</a:t>
                       </a:r>
                     </a:p>
                   </a:txBody>
@@ -26579,7 +26579,7 @@
                           <a:ea typeface="+mn-ea"/>
                           <a:cs typeface="+mn-cs"/>
                         </a:rPr>
-                        <a:t>0.14</a:t>
+                        <a:t>0,14</a:t>
                       </a:r>
                     </a:p>
                   </a:txBody>
@@ -26677,7 +26677,7 @@
                           <a:ea typeface="+mn-ea"/>
                           <a:cs typeface="+mn-cs"/>
                         </a:rPr>
-                        <a:t>0.12</a:t>
+                        <a:t>0,12</a:t>
                       </a:r>
                     </a:p>
                   </a:txBody>
@@ -26768,7 +26768,7 @@
                           <a:ea typeface="+mn-ea"/>
                           <a:cs typeface="+mn-cs"/>
                         </a:rPr>
-                        <a:t>0.207</a:t>
+                        <a:t>0,207</a:t>
                       </a:r>
                     </a:p>
                   </a:txBody>
@@ -26859,7 +26859,7 @@
                           <a:ea typeface="+mn-ea"/>
                           <a:cs typeface="+mn-cs"/>
                         </a:rPr>
-                        <a:t>0.35</a:t>
+                        <a:t>0,35</a:t>
                       </a:r>
                     </a:p>
                   </a:txBody>
@@ -26950,7 +26950,7 @@
                           <a:ea typeface="+mn-ea"/>
                           <a:cs typeface="+mn-cs"/>
                         </a:rPr>
-                        <a:t>0.063</a:t>
+                        <a:t>0,063</a:t>
                       </a:r>
                     </a:p>
                   </a:txBody>
@@ -27041,7 +27041,7 @@
                           <a:ea typeface="+mn-ea"/>
                           <a:cs typeface="+mn-cs"/>
                         </a:rPr>
-                        <a:t>0.81</a:t>
+                        <a:t>0,81</a:t>
                       </a:r>
                     </a:p>
                   </a:txBody>
@@ -27139,7 +27139,7 @@
                           <a:ea typeface="+mn-ea"/>
                           <a:cs typeface="+mn-cs"/>
                         </a:rPr>
-                        <a:t>0.08</a:t>
+                        <a:t>0,08</a:t>
                       </a:r>
                     </a:p>
                   </a:txBody>
@@ -27230,7 +27230,7 @@
                           <a:ea typeface="+mn-ea"/>
                           <a:cs typeface="+mn-cs"/>
                         </a:rPr>
-                        <a:t>0.51</a:t>
+                        <a:t>0,51</a:t>
                       </a:r>
                     </a:p>
                   </a:txBody>
@@ -27321,7 +27321,7 @@
                           <a:ea typeface="+mn-ea"/>
                           <a:cs typeface="+mn-cs"/>
                         </a:rPr>
-                        <a:t>0.1</a:t>
+                        <a:t>0,1</a:t>
                       </a:r>
                     </a:p>
                   </a:txBody>
@@ -27412,7 +27412,7 @@
                           <a:ea typeface="+mn-ea"/>
                           <a:cs typeface="+mn-cs"/>
                         </a:rPr>
-                        <a:t>0.27</a:t>
+                        <a:t>0,27</a:t>
                       </a:r>
                     </a:p>
                   </a:txBody>
@@ -27503,7 +27503,7 @@
                           <a:ea typeface="+mn-ea"/>
                           <a:cs typeface="+mn-cs"/>
                         </a:rPr>
-                        <a:t>0.687</a:t>
+                        <a:t>0,687</a:t>
                       </a:r>
                     </a:p>
                   </a:txBody>
@@ -34172,7 +34172,7 @@
                           <a:ea typeface="+mn-ea"/>
                           <a:cs typeface="+mn-cs"/>
                         </a:rPr>
-                        <a:t>0.4</a:t>
+                        <a:t>0,4</a:t>
                       </a:r>
                     </a:p>
                   </a:txBody>
@@ -34263,7 +34263,7 @@
                           <a:ea typeface="+mn-ea"/>
                           <a:cs typeface="+mn-cs"/>
                         </a:rPr>
-                        <a:t>0.17</a:t>
+                        <a:t>0,17</a:t>
                       </a:r>
                     </a:p>
                   </a:txBody>
@@ -34354,7 +34354,7 @@
                           <a:ea typeface="+mn-ea"/>
                           <a:cs typeface="+mn-cs"/>
                         </a:rPr>
-                        <a:t>0.250</a:t>
+                        <a:t>0,250</a:t>
                       </a:r>
                     </a:p>
                   </a:txBody>
@@ -34445,7 +34445,7 @@
                           <a:ea typeface="+mn-ea"/>
                           <a:cs typeface="+mn-cs"/>
                         </a:rPr>
-                        <a:t>0.8</a:t>
+                        <a:t>0,8</a:t>
                       </a:r>
                     </a:p>
                   </a:txBody>
@@ -34536,7 +34536,7 @@
                           <a:ea typeface="+mn-ea"/>
                           <a:cs typeface="+mn-cs"/>
                         </a:rPr>
-                        <a:t>0.198</a:t>
+                        <a:t>0,198</a:t>
                       </a:r>
                     </a:p>
                   </a:txBody>
@@ -34634,7 +34634,7 @@
                           <a:ea typeface="+mn-ea"/>
                           <a:cs typeface="+mn-cs"/>
                         </a:rPr>
-                        <a:t>0.159</a:t>
+                        <a:t>0,159</a:t>
                       </a:r>
                     </a:p>
                   </a:txBody>
@@ -34725,7 +34725,7 @@
                           <a:ea typeface="+mn-ea"/>
                           <a:cs typeface="+mn-cs"/>
                         </a:rPr>
-                        <a:t>0.6</a:t>
+                        <a:t>0,6</a:t>
                       </a:r>
                     </a:p>
                   </a:txBody>
@@ -34816,7 +34816,7 @@
                           <a:ea typeface="+mn-ea"/>
                           <a:cs typeface="+mn-cs"/>
                         </a:rPr>
-                        <a:t>0.045</a:t>
+                        <a:t>0,045</a:t>
                       </a:r>
                     </a:p>
                   </a:txBody>
@@ -34907,7 +34907,7 @@
                           <a:ea typeface="+mn-ea"/>
                           <a:cs typeface="+mn-cs"/>
                         </a:rPr>
-                        <a:t>0.558</a:t>
+                        <a:t>0,558</a:t>
                       </a:r>
                     </a:p>
                   </a:txBody>
@@ -34998,7 +34998,7 @@
                           <a:ea typeface="+mn-ea"/>
                           <a:cs typeface="+mn-cs"/>
                         </a:rPr>
-                        <a:t>0.14</a:t>
+                        <a:t>0,14</a:t>
                       </a:r>
                     </a:p>
                   </a:txBody>
@@ -35096,7 +35096,7 @@
                           <a:ea typeface="+mn-ea"/>
                           <a:cs typeface="+mn-cs"/>
                         </a:rPr>
-                        <a:t>0.12</a:t>
+                        <a:t>0,12</a:t>
                       </a:r>
                     </a:p>
                   </a:txBody>
@@ -35187,7 +35187,7 @@
                           <a:ea typeface="+mn-ea"/>
                           <a:cs typeface="+mn-cs"/>
                         </a:rPr>
-                        <a:t>0.207</a:t>
+                        <a:t>0,207</a:t>
                       </a:r>
                     </a:p>
                   </a:txBody>
@@ -35278,7 +35278,7 @@
                           <a:ea typeface="+mn-ea"/>
                           <a:cs typeface="+mn-cs"/>
                         </a:rPr>
-                        <a:t>0.35</a:t>
+                        <a:t>0,35</a:t>
                       </a:r>
                     </a:p>
                   </a:txBody>
@@ -35369,7 +35369,7 @@
                           <a:ea typeface="+mn-ea"/>
                           <a:cs typeface="+mn-cs"/>
                         </a:rPr>
-                        <a:t>0.063</a:t>
+                        <a:t>0,063</a:t>
                       </a:r>
                     </a:p>
                   </a:txBody>
@@ -35460,7 +35460,7 @@
                           <a:ea typeface="+mn-ea"/>
                           <a:cs typeface="+mn-cs"/>
                         </a:rPr>
-                        <a:t>0.81</a:t>
+                        <a:t>0,81</a:t>
                       </a:r>
                     </a:p>
                   </a:txBody>
@@ -35558,7 +35558,7 @@
                           <a:ea typeface="+mn-ea"/>
                           <a:cs typeface="+mn-cs"/>
                         </a:rPr>
-                        <a:t>0.08</a:t>
+                        <a:t>0,08</a:t>
                       </a:r>
                     </a:p>
                   </a:txBody>
@@ -35649,7 +35649,7 @@
                           <a:ea typeface="+mn-ea"/>
                           <a:cs typeface="+mn-cs"/>
                         </a:rPr>
-                        <a:t>0.51</a:t>
+                        <a:t>0,51</a:t>
                       </a:r>
                     </a:p>
                   </a:txBody>
@@ -35740,7 +35740,7 @@
                           <a:ea typeface="+mn-ea"/>
                           <a:cs typeface="+mn-cs"/>
                         </a:rPr>
-                        <a:t>0.1</a:t>
+                        <a:t>0,1</a:t>
                       </a:r>
                     </a:p>
                   </a:txBody>
@@ -35831,7 +35831,7 @@
                           <a:ea typeface="+mn-ea"/>
                           <a:cs typeface="+mn-cs"/>
                         </a:rPr>
-                        <a:t>0.27</a:t>
+                        <a:t>0,27</a:t>
                       </a:r>
                     </a:p>
                   </a:txBody>
@@ -35922,7 +35922,7 @@
                           <a:ea typeface="+mn-ea"/>
                           <a:cs typeface="+mn-cs"/>
                         </a:rPr>
-                        <a:t>0.687</a:t>
+                        <a:t>0,687</a:t>
                       </a:r>
                     </a:p>
                   </a:txBody>
